--- a/public/fun/pack/pptx/wedding/결혼식_14_오시는길중심_장마철우산.pptx
+++ b/public/fun/pack/pptx/wedding/결혼식_14_오시는길중심_장마철우산.pptx
@@ -3347,7 +3347,7 @@
             <a:r>
               <a:rPr sz="3600" b="1" i="0">
                 <a:solidFill>
-                  <a:srgbClr val="19294D"/>
+                  <a:srgbClr val="11285F"/>
                 </a:solidFill>
               </a:rPr>
               <a:t>저희 결혼합니다</a:t>
@@ -3385,7 +3385,7 @@
             <a:r>
               <a:rPr sz="1700" b="0" i="1">
                 <a:solidFill>
-                  <a:srgbClr val="19294D"/>
+                  <a:srgbClr val="11285F"/>
                 </a:solidFill>
               </a:rPr>
               <a:t>처음 오시는 분은 안내 표지를 따라오세요</a:t>
@@ -3460,7 +3460,7 @@
     <p:bg>
       <p:bgPr>
         <a:solidFill>
-          <a:srgbClr val="F0F3FA"/>
+          <a:srgbClr val="EEF2FC"/>
         </a:solidFill>
         <a:effectLst/>
       </p:bgPr>
@@ -3487,7 +3487,7 @@
             <a:avLst/>
           </a:prstGeom>
           <a:solidFill>
-            <a:srgbClr val="335299"/>
+            <a:srgbClr val="2655C5"/>
           </a:solidFill>
           <a:ln>
             <a:noFill/>
@@ -3516,7 +3516,7 @@
             <a:avLst/>
           </a:prstGeom>
           <a:solidFill>
-            <a:srgbClr val="914C3B"/>
+            <a:srgbClr val="209DB6"/>
           </a:solidFill>
           <a:ln>
             <a:noFill/>
@@ -3560,7 +3560,7 @@
             <a:r>
               <a:rPr sz="3000" b="1" i="0">
                 <a:solidFill>
-                  <a:srgbClr val="19294D"/>
+                  <a:srgbClr val="11285F"/>
                 </a:solidFill>
               </a:rPr>
               <a:t>신랑 · 신부 소개</a:t>
@@ -3583,11 +3583,11 @@
             <a:avLst/>
           </a:prstGeom>
           <a:solidFill>
-            <a:srgbClr val="D0DAF1"/>
+            <a:srgbClr val="D1DDFA"/>
           </a:solidFill>
           <a:ln w="19050">
             <a:solidFill>
-              <a:srgbClr val="335299"/>
+              <a:srgbClr val="2655C5"/>
             </a:solidFill>
             <a:prstDash val="dash"/>
           </a:ln>
@@ -3606,7 +3606,7 @@
             <a:r>
               <a:rPr sz="1200" b="0" i="0">
                 <a:solidFill>
-                  <a:srgbClr val="19294D"/>
+                  <a:srgbClr val="11285F"/>
                 </a:solidFill>
               </a:rPr>
               <a:t>사진</a:t>
@@ -3644,7 +3644,7 @@
             <a:r>
               <a:rPr sz="1600" b="1" i="0">
                 <a:solidFill>
-                  <a:srgbClr val="19294D"/>
+                  <a:srgbClr val="11285F"/>
                 </a:solidFill>
               </a:rPr>
               <a:t>신랑</a:t>
@@ -3735,11 +3735,11 @@
             <a:avLst/>
           </a:prstGeom>
           <a:solidFill>
-            <a:srgbClr val="D0DAF1"/>
+            <a:srgbClr val="D1DDFA"/>
           </a:solidFill>
           <a:ln w="19050">
             <a:solidFill>
-              <a:srgbClr val="335299"/>
+              <a:srgbClr val="2655C5"/>
             </a:solidFill>
             <a:prstDash val="dash"/>
           </a:ln>
@@ -3758,7 +3758,7 @@
             <a:r>
               <a:rPr sz="1200" b="0" i="0">
                 <a:solidFill>
-                  <a:srgbClr val="19294D"/>
+                  <a:srgbClr val="11285F"/>
                 </a:solidFill>
               </a:rPr>
               <a:t>사진</a:t>
@@ -3796,7 +3796,7 @@
             <a:r>
               <a:rPr sz="1600" b="1" i="0">
                 <a:solidFill>
-                  <a:srgbClr val="19294D"/>
+                  <a:srgbClr val="11285F"/>
                 </a:solidFill>
               </a:rPr>
               <a:t>신부</a:t>
@@ -3886,7 +3886,7 @@
     <p:bg>
       <p:bgPr>
         <a:solidFill>
-          <a:srgbClr val="F0F3FA"/>
+          <a:srgbClr val="EEF2FC"/>
         </a:solidFill>
         <a:effectLst/>
       </p:bgPr>
@@ -3913,7 +3913,7 @@
             <a:avLst/>
           </a:prstGeom>
           <a:solidFill>
-            <a:srgbClr val="335299"/>
+            <a:srgbClr val="2655C5"/>
           </a:solidFill>
           <a:ln>
             <a:noFill/>
@@ -3942,7 +3942,7 @@
             <a:avLst/>
           </a:prstGeom>
           <a:solidFill>
-            <a:srgbClr val="914C3B"/>
+            <a:srgbClr val="209DB6"/>
           </a:solidFill>
           <a:ln>
             <a:noFill/>
@@ -3986,7 +3986,7 @@
             <a:r>
               <a:rPr sz="3000" b="1" i="0">
                 <a:solidFill>
-                  <a:srgbClr val="19294D"/>
+                  <a:srgbClr val="11285F"/>
                 </a:solidFill>
               </a:rPr>
               <a:t>오시는 길</a:t>
@@ -4011,11 +4011,11 @@
             </a:avLst>
           </a:prstGeom>
           <a:solidFill>
-            <a:srgbClr val="D0DAF1"/>
+            <a:srgbClr val="D1DDFA"/>
           </a:solidFill>
           <a:ln w="19050">
             <a:solidFill>
-              <a:srgbClr val="335299"/>
+              <a:srgbClr val="2655C5"/>
             </a:solidFill>
             <a:prstDash val="dash"/>
           </a:ln>
@@ -4034,7 +4034,7 @@
             <a:r>
               <a:rPr sz="1400" b="0" i="0">
                 <a:solidFill>
-                  <a:srgbClr val="19294D"/>
+                  <a:srgbClr val="11285F"/>
                 </a:solidFill>
               </a:rPr>
               <a:t>약도 · 지도를 넣어 주세요</a:t>
@@ -4074,7 +4074,7 @@
                       <a:r>
                         <a:rPr sz="1400" b="1">
                           <a:solidFill>
-                            <a:srgbClr val="19294D"/>
+                            <a:srgbClr val="11285F"/>
                           </a:solidFill>
                         </a:rPr>
                         <a:t>예식장</a:t>
@@ -4084,30 +4084,30 @@
                   <a:tcPr anchor="ctr" marL="73152" marR="73152">
                     <a:lnL w="9525" cap="flat" cmpd="sng" algn="ctr">
                       <a:solidFill>
-                        <a:srgbClr val="D0DAF1"/>
+                        <a:srgbClr val="D1DDFA"/>
                       </a:solidFill>
                       <a:prstDash val="solid"/>
                     </a:lnL>
                     <a:lnR w="9525" cap="flat" cmpd="sng" algn="ctr">
                       <a:solidFill>
-                        <a:srgbClr val="D0DAF1"/>
+                        <a:srgbClr val="D1DDFA"/>
                       </a:solidFill>
                       <a:prstDash val="solid"/>
                     </a:lnR>
                     <a:lnT w="9525" cap="flat" cmpd="sng" algn="ctr">
                       <a:solidFill>
-                        <a:srgbClr val="D0DAF1"/>
+                        <a:srgbClr val="D1DDFA"/>
                       </a:solidFill>
                       <a:prstDash val="solid"/>
                     </a:lnT>
                     <a:lnB w="9525" cap="flat" cmpd="sng" algn="ctr">
                       <a:solidFill>
-                        <a:srgbClr val="D0DAF1"/>
+                        <a:srgbClr val="D1DDFA"/>
                       </a:solidFill>
                       <a:prstDash val="solid"/>
                     </a:lnB>
                     <a:solidFill>
-                      <a:srgbClr val="D0DAF1"/>
+                      <a:srgbClr val="D1DDFA"/>
                     </a:solidFill>
                   </a:tcPr>
                 </a:tc>
@@ -4130,30 +4130,30 @@
                   <a:tcPr anchor="ctr" marL="73152" marR="73152">
                     <a:lnL w="9525" cap="flat" cmpd="sng" algn="ctr">
                       <a:solidFill>
-                        <a:srgbClr val="D0DAF1"/>
+                        <a:srgbClr val="D1DDFA"/>
                       </a:solidFill>
                       <a:prstDash val="solid"/>
                     </a:lnL>
                     <a:lnR w="9525" cap="flat" cmpd="sng" algn="ctr">
                       <a:solidFill>
-                        <a:srgbClr val="D0DAF1"/>
+                        <a:srgbClr val="D1DDFA"/>
                       </a:solidFill>
                       <a:prstDash val="solid"/>
                     </a:lnR>
                     <a:lnT w="9525" cap="flat" cmpd="sng" algn="ctr">
                       <a:solidFill>
-                        <a:srgbClr val="D0DAF1"/>
+                        <a:srgbClr val="D1DDFA"/>
                       </a:solidFill>
                       <a:prstDash val="solid"/>
                     </a:lnT>
                     <a:lnB w="9525" cap="flat" cmpd="sng" algn="ctr">
                       <a:solidFill>
-                        <a:srgbClr val="D0DAF1"/>
+                        <a:srgbClr val="D1DDFA"/>
                       </a:solidFill>
                       <a:prstDash val="solid"/>
                     </a:lnB>
                     <a:solidFill>
-                      <a:srgbClr val="F0F3FA"/>
+                      <a:srgbClr val="EEF2FC"/>
                     </a:solidFill>
                   </a:tcPr>
                 </a:tc>
@@ -4168,7 +4168,7 @@
                       <a:r>
                         <a:rPr sz="1400" b="1">
                           <a:solidFill>
-                            <a:srgbClr val="19294D"/>
+                            <a:srgbClr val="11285F"/>
                           </a:solidFill>
                         </a:rPr>
                         <a:t>주소</a:t>
@@ -4178,30 +4178,30 @@
                   <a:tcPr anchor="ctr" marL="73152" marR="73152">
                     <a:lnL w="9525" cap="flat" cmpd="sng" algn="ctr">
                       <a:solidFill>
-                        <a:srgbClr val="D0DAF1"/>
+                        <a:srgbClr val="D1DDFA"/>
                       </a:solidFill>
                       <a:prstDash val="solid"/>
                     </a:lnL>
                     <a:lnR w="9525" cap="flat" cmpd="sng" algn="ctr">
                       <a:solidFill>
-                        <a:srgbClr val="D0DAF1"/>
+                        <a:srgbClr val="D1DDFA"/>
                       </a:solidFill>
                       <a:prstDash val="solid"/>
                     </a:lnR>
                     <a:lnT w="9525" cap="flat" cmpd="sng" algn="ctr">
                       <a:solidFill>
-                        <a:srgbClr val="D0DAF1"/>
+                        <a:srgbClr val="D1DDFA"/>
                       </a:solidFill>
                       <a:prstDash val="solid"/>
                     </a:lnT>
                     <a:lnB w="9525" cap="flat" cmpd="sng" algn="ctr">
                       <a:solidFill>
-                        <a:srgbClr val="D0DAF1"/>
+                        <a:srgbClr val="D1DDFA"/>
                       </a:solidFill>
                       <a:prstDash val="solid"/>
                     </a:lnB>
                     <a:solidFill>
-                      <a:srgbClr val="D0DAF1"/>
+                      <a:srgbClr val="D1DDFA"/>
                     </a:solidFill>
                   </a:tcPr>
                 </a:tc>
@@ -4224,25 +4224,25 @@
                   <a:tcPr anchor="ctr" marL="73152" marR="73152">
                     <a:lnL w="9525" cap="flat" cmpd="sng" algn="ctr">
                       <a:solidFill>
-                        <a:srgbClr val="D0DAF1"/>
+                        <a:srgbClr val="D1DDFA"/>
                       </a:solidFill>
                       <a:prstDash val="solid"/>
                     </a:lnL>
                     <a:lnR w="9525" cap="flat" cmpd="sng" algn="ctr">
                       <a:solidFill>
-                        <a:srgbClr val="D0DAF1"/>
+                        <a:srgbClr val="D1DDFA"/>
                       </a:solidFill>
                       <a:prstDash val="solid"/>
                     </a:lnR>
                     <a:lnT w="9525" cap="flat" cmpd="sng" algn="ctr">
                       <a:solidFill>
-                        <a:srgbClr val="D0DAF1"/>
+                        <a:srgbClr val="D1DDFA"/>
                       </a:solidFill>
                       <a:prstDash val="solid"/>
                     </a:lnT>
                     <a:lnB w="9525" cap="flat" cmpd="sng" algn="ctr">
                       <a:solidFill>
-                        <a:srgbClr val="D0DAF1"/>
+                        <a:srgbClr val="D1DDFA"/>
                       </a:solidFill>
                       <a:prstDash val="solid"/>
                     </a:lnB>
@@ -4262,7 +4262,7 @@
                       <a:r>
                         <a:rPr sz="1400" b="1">
                           <a:solidFill>
-                            <a:srgbClr val="19294D"/>
+                            <a:srgbClr val="11285F"/>
                           </a:solidFill>
                         </a:rPr>
                         <a:t>일시</a:t>
@@ -4272,30 +4272,30 @@
                   <a:tcPr anchor="ctr" marL="73152" marR="73152">
                     <a:lnL w="9525" cap="flat" cmpd="sng" algn="ctr">
                       <a:solidFill>
-                        <a:srgbClr val="D0DAF1"/>
+                        <a:srgbClr val="D1DDFA"/>
                       </a:solidFill>
                       <a:prstDash val="solid"/>
                     </a:lnL>
                     <a:lnR w="9525" cap="flat" cmpd="sng" algn="ctr">
                       <a:solidFill>
-                        <a:srgbClr val="D0DAF1"/>
+                        <a:srgbClr val="D1DDFA"/>
                       </a:solidFill>
                       <a:prstDash val="solid"/>
                     </a:lnR>
                     <a:lnT w="9525" cap="flat" cmpd="sng" algn="ctr">
                       <a:solidFill>
-                        <a:srgbClr val="D0DAF1"/>
+                        <a:srgbClr val="D1DDFA"/>
                       </a:solidFill>
                       <a:prstDash val="solid"/>
                     </a:lnT>
                     <a:lnB w="9525" cap="flat" cmpd="sng" algn="ctr">
                       <a:solidFill>
-                        <a:srgbClr val="D0DAF1"/>
+                        <a:srgbClr val="D1DDFA"/>
                       </a:solidFill>
                       <a:prstDash val="solid"/>
                     </a:lnB>
                     <a:solidFill>
-                      <a:srgbClr val="D0DAF1"/>
+                      <a:srgbClr val="D1DDFA"/>
                     </a:solidFill>
                   </a:tcPr>
                 </a:tc>
@@ -4318,30 +4318,30 @@
                   <a:tcPr anchor="ctr" marL="73152" marR="73152">
                     <a:lnL w="9525" cap="flat" cmpd="sng" algn="ctr">
                       <a:solidFill>
-                        <a:srgbClr val="D0DAF1"/>
+                        <a:srgbClr val="D1DDFA"/>
                       </a:solidFill>
                       <a:prstDash val="solid"/>
                     </a:lnL>
                     <a:lnR w="9525" cap="flat" cmpd="sng" algn="ctr">
                       <a:solidFill>
-                        <a:srgbClr val="D0DAF1"/>
+                        <a:srgbClr val="D1DDFA"/>
                       </a:solidFill>
                       <a:prstDash val="solid"/>
                     </a:lnR>
                     <a:lnT w="9525" cap="flat" cmpd="sng" algn="ctr">
                       <a:solidFill>
-                        <a:srgbClr val="D0DAF1"/>
+                        <a:srgbClr val="D1DDFA"/>
                       </a:solidFill>
                       <a:prstDash val="solid"/>
                     </a:lnT>
                     <a:lnB w="9525" cap="flat" cmpd="sng" algn="ctr">
                       <a:solidFill>
-                        <a:srgbClr val="D0DAF1"/>
+                        <a:srgbClr val="D1DDFA"/>
                       </a:solidFill>
                       <a:prstDash val="solid"/>
                     </a:lnB>
                     <a:solidFill>
-                      <a:srgbClr val="F0F3FA"/>
+                      <a:srgbClr val="EEF2FC"/>
                     </a:solidFill>
                   </a:tcPr>
                 </a:tc>
@@ -4356,7 +4356,7 @@
                       <a:r>
                         <a:rPr sz="1400" b="1">
                           <a:solidFill>
-                            <a:srgbClr val="19294D"/>
+                            <a:srgbClr val="11285F"/>
                           </a:solidFill>
                         </a:rPr>
                         <a:t>연락처</a:t>
@@ -4366,30 +4366,30 @@
                   <a:tcPr anchor="ctr" marL="73152" marR="73152">
                     <a:lnL w="9525" cap="flat" cmpd="sng" algn="ctr">
                       <a:solidFill>
-                        <a:srgbClr val="D0DAF1"/>
+                        <a:srgbClr val="D1DDFA"/>
                       </a:solidFill>
                       <a:prstDash val="solid"/>
                     </a:lnL>
                     <a:lnR w="9525" cap="flat" cmpd="sng" algn="ctr">
                       <a:solidFill>
-                        <a:srgbClr val="D0DAF1"/>
+                        <a:srgbClr val="D1DDFA"/>
                       </a:solidFill>
                       <a:prstDash val="solid"/>
                     </a:lnR>
                     <a:lnT w="9525" cap="flat" cmpd="sng" algn="ctr">
                       <a:solidFill>
-                        <a:srgbClr val="D0DAF1"/>
+                        <a:srgbClr val="D1DDFA"/>
                       </a:solidFill>
                       <a:prstDash val="solid"/>
                     </a:lnT>
                     <a:lnB w="9525" cap="flat" cmpd="sng" algn="ctr">
                       <a:solidFill>
-                        <a:srgbClr val="D0DAF1"/>
+                        <a:srgbClr val="D1DDFA"/>
                       </a:solidFill>
                       <a:prstDash val="solid"/>
                     </a:lnB>
                     <a:solidFill>
-                      <a:srgbClr val="D0DAF1"/>
+                      <a:srgbClr val="D1DDFA"/>
                     </a:solidFill>
                   </a:tcPr>
                 </a:tc>
@@ -4412,25 +4412,25 @@
                   <a:tcPr anchor="ctr" marL="73152" marR="73152">
                     <a:lnL w="9525" cap="flat" cmpd="sng" algn="ctr">
                       <a:solidFill>
-                        <a:srgbClr val="D0DAF1"/>
+                        <a:srgbClr val="D1DDFA"/>
                       </a:solidFill>
                       <a:prstDash val="solid"/>
                     </a:lnL>
                     <a:lnR w="9525" cap="flat" cmpd="sng" algn="ctr">
                       <a:solidFill>
-                        <a:srgbClr val="D0DAF1"/>
+                        <a:srgbClr val="D1DDFA"/>
                       </a:solidFill>
                       <a:prstDash val="solid"/>
                     </a:lnR>
                     <a:lnT w="9525" cap="flat" cmpd="sng" algn="ctr">
                       <a:solidFill>
-                        <a:srgbClr val="D0DAF1"/>
+                        <a:srgbClr val="D1DDFA"/>
                       </a:solidFill>
                       <a:prstDash val="solid"/>
                     </a:lnT>
                     <a:lnB w="9525" cap="flat" cmpd="sng" algn="ctr">
                       <a:solidFill>
-                        <a:srgbClr val="D0DAF1"/>
+                        <a:srgbClr val="D1DDFA"/>
                       </a:solidFill>
                       <a:prstDash val="solid"/>
                     </a:lnB>
@@ -4458,7 +4458,7 @@
     <p:bg>
       <p:bgPr>
         <a:solidFill>
-          <a:srgbClr val="F0F3FA"/>
+          <a:srgbClr val="EEF2FC"/>
         </a:solidFill>
         <a:effectLst/>
       </p:bgPr>
@@ -4485,7 +4485,7 @@
             <a:avLst/>
           </a:prstGeom>
           <a:solidFill>
-            <a:srgbClr val="335299"/>
+            <a:srgbClr val="2655C5"/>
           </a:solidFill>
           <a:ln>
             <a:noFill/>
@@ -4514,7 +4514,7 @@
             <a:avLst/>
           </a:prstGeom>
           <a:solidFill>
-            <a:srgbClr val="914C3B"/>
+            <a:srgbClr val="209DB6"/>
           </a:solidFill>
           <a:ln>
             <a:noFill/>
@@ -4558,7 +4558,7 @@
             <a:r>
               <a:rPr sz="3000" b="1" i="0">
                 <a:solidFill>
-                  <a:srgbClr val="19294D"/>
+                  <a:srgbClr val="11285F"/>
                 </a:solidFill>
               </a:rPr>
               <a:t>교통 안내</a:t>
@@ -4583,11 +4583,11 @@
             </a:avLst>
           </a:prstGeom>
           <a:solidFill>
-            <a:srgbClr val="F0F3FA"/>
+            <a:srgbClr val="EEF2FC"/>
           </a:solidFill>
           <a:ln w="15875">
             <a:solidFill>
-              <a:srgbClr val="D0DAF1"/>
+              <a:srgbClr val="D1DDFA"/>
             </a:solidFill>
           </a:ln>
         </p:spPr>
@@ -4614,7 +4614,7 @@
             <a:avLst/>
           </a:prstGeom>
           <a:solidFill>
-            <a:srgbClr val="335299"/>
+            <a:srgbClr val="2655C5"/>
           </a:solidFill>
           <a:ln>
             <a:noFill/>
@@ -4672,7 +4672,7 @@
             <a:r>
               <a:rPr sz="1800" b="1" i="0">
                 <a:solidFill>
-                  <a:srgbClr val="19294D"/>
+                  <a:srgbClr val="11285F"/>
                 </a:solidFill>
               </a:rPr>
               <a:t>지하철</a:t>
@@ -4735,11 +4735,11 @@
             </a:avLst>
           </a:prstGeom>
           <a:solidFill>
-            <a:srgbClr val="F0F3FA"/>
+            <a:srgbClr val="EEF2FC"/>
           </a:solidFill>
           <a:ln w="15875">
             <a:solidFill>
-              <a:srgbClr val="D0DAF1"/>
+              <a:srgbClr val="D1DDFA"/>
             </a:solidFill>
           </a:ln>
         </p:spPr>
@@ -4766,7 +4766,7 @@
             <a:avLst/>
           </a:prstGeom>
           <a:solidFill>
-            <a:srgbClr val="335299"/>
+            <a:srgbClr val="2655C5"/>
           </a:solidFill>
           <a:ln>
             <a:noFill/>
@@ -4824,7 +4824,7 @@
             <a:r>
               <a:rPr sz="1800" b="1" i="0">
                 <a:solidFill>
-                  <a:srgbClr val="19294D"/>
+                  <a:srgbClr val="11285F"/>
                 </a:solidFill>
               </a:rPr>
               <a:t>버스</a:t>
@@ -4887,11 +4887,11 @@
             </a:avLst>
           </a:prstGeom>
           <a:solidFill>
-            <a:srgbClr val="F0F3FA"/>
+            <a:srgbClr val="EEF2FC"/>
           </a:solidFill>
           <a:ln w="15875">
             <a:solidFill>
-              <a:srgbClr val="D0DAF1"/>
+              <a:srgbClr val="D1DDFA"/>
             </a:solidFill>
           </a:ln>
         </p:spPr>
@@ -4918,7 +4918,7 @@
             <a:avLst/>
           </a:prstGeom>
           <a:solidFill>
-            <a:srgbClr val="335299"/>
+            <a:srgbClr val="2655C5"/>
           </a:solidFill>
           <a:ln>
             <a:noFill/>
@@ -4976,7 +4976,7 @@
             <a:r>
               <a:rPr sz="1800" b="1" i="0">
                 <a:solidFill>
-                  <a:srgbClr val="19294D"/>
+                  <a:srgbClr val="11285F"/>
                 </a:solidFill>
               </a:rPr>
               <a:t>자가용 · 주차</a:t>
@@ -5036,7 +5036,7 @@
     <p:bg>
       <p:bgPr>
         <a:solidFill>
-          <a:srgbClr val="F0F3FA"/>
+          <a:srgbClr val="EEF2FC"/>
         </a:solidFill>
         <a:effectLst/>
       </p:bgPr>
@@ -5063,7 +5063,7 @@
             <a:avLst/>
           </a:prstGeom>
           <a:solidFill>
-            <a:srgbClr val="335299"/>
+            <a:srgbClr val="2655C5"/>
           </a:solidFill>
           <a:ln>
             <a:noFill/>
@@ -5092,7 +5092,7 @@
             <a:avLst/>
           </a:prstGeom>
           <a:solidFill>
-            <a:srgbClr val="914C3B"/>
+            <a:srgbClr val="209DB6"/>
           </a:solidFill>
           <a:ln>
             <a:noFill/>
@@ -5136,7 +5136,7 @@
             <a:r>
               <a:rPr sz="3000" b="1" i="0">
                 <a:solidFill>
-                  <a:srgbClr val="19294D"/>
+                  <a:srgbClr val="11285F"/>
                 </a:solidFill>
               </a:rPr>
               <a:t>웨딩 사진</a:t>
@@ -5161,11 +5161,11 @@
             </a:avLst>
           </a:prstGeom>
           <a:solidFill>
-            <a:srgbClr val="D0DAF1"/>
+            <a:srgbClr val="D1DDFA"/>
           </a:solidFill>
           <a:ln w="19050">
             <a:solidFill>
-              <a:srgbClr val="335299"/>
+              <a:srgbClr val="2655C5"/>
             </a:solidFill>
             <a:prstDash val="dash"/>
           </a:ln>
@@ -5184,7 +5184,7 @@
             <a:r>
               <a:rPr sz="1200" b="0" i="0">
                 <a:solidFill>
-                  <a:srgbClr val="19294D"/>
+                  <a:srgbClr val="11285F"/>
                 </a:solidFill>
               </a:rPr>
               <a:t>사진 1</a:t>
@@ -5209,11 +5209,11 @@
             </a:avLst>
           </a:prstGeom>
           <a:solidFill>
-            <a:srgbClr val="D0DAF1"/>
+            <a:srgbClr val="D1DDFA"/>
           </a:solidFill>
           <a:ln w="19050">
             <a:solidFill>
-              <a:srgbClr val="335299"/>
+              <a:srgbClr val="2655C5"/>
             </a:solidFill>
             <a:prstDash val="dash"/>
           </a:ln>
@@ -5232,7 +5232,7 @@
             <a:r>
               <a:rPr sz="1200" b="0" i="0">
                 <a:solidFill>
-                  <a:srgbClr val="19294D"/>
+                  <a:srgbClr val="11285F"/>
                 </a:solidFill>
               </a:rPr>
               <a:t>사진 2</a:t>
@@ -5257,11 +5257,11 @@
             </a:avLst>
           </a:prstGeom>
           <a:solidFill>
-            <a:srgbClr val="D0DAF1"/>
+            <a:srgbClr val="D1DDFA"/>
           </a:solidFill>
           <a:ln w="19050">
             <a:solidFill>
-              <a:srgbClr val="335299"/>
+              <a:srgbClr val="2655C5"/>
             </a:solidFill>
             <a:prstDash val="dash"/>
           </a:ln>
@@ -5280,7 +5280,7 @@
             <a:r>
               <a:rPr sz="1200" b="0" i="0">
                 <a:solidFill>
-                  <a:srgbClr val="19294D"/>
+                  <a:srgbClr val="11285F"/>
                 </a:solidFill>
               </a:rPr>
               <a:t>사진 3</a:t>
@@ -5305,11 +5305,11 @@
             </a:avLst>
           </a:prstGeom>
           <a:solidFill>
-            <a:srgbClr val="D0DAF1"/>
+            <a:srgbClr val="D1DDFA"/>
           </a:solidFill>
           <a:ln w="19050">
             <a:solidFill>
-              <a:srgbClr val="335299"/>
+              <a:srgbClr val="2655C5"/>
             </a:solidFill>
             <a:prstDash val="dash"/>
           </a:ln>
@@ -5328,7 +5328,7 @@
             <a:r>
               <a:rPr sz="1200" b="0" i="0">
                 <a:solidFill>
-                  <a:srgbClr val="19294D"/>
+                  <a:srgbClr val="11285F"/>
                 </a:solidFill>
               </a:rPr>
               <a:t>사진 4</a:t>
@@ -5353,11 +5353,11 @@
             </a:avLst>
           </a:prstGeom>
           <a:solidFill>
-            <a:srgbClr val="D0DAF1"/>
+            <a:srgbClr val="D1DDFA"/>
           </a:solidFill>
           <a:ln w="19050">
             <a:solidFill>
-              <a:srgbClr val="335299"/>
+              <a:srgbClr val="2655C5"/>
             </a:solidFill>
             <a:prstDash val="dash"/>
           </a:ln>
@@ -5376,7 +5376,7 @@
             <a:r>
               <a:rPr sz="1200" b="0" i="0">
                 <a:solidFill>
-                  <a:srgbClr val="19294D"/>
+                  <a:srgbClr val="11285F"/>
                 </a:solidFill>
               </a:rPr>
               <a:t>사진 5</a:t>
@@ -5401,11 +5401,11 @@
             </a:avLst>
           </a:prstGeom>
           <a:solidFill>
-            <a:srgbClr val="D0DAF1"/>
+            <a:srgbClr val="D1DDFA"/>
           </a:solidFill>
           <a:ln w="19050">
             <a:solidFill>
-              <a:srgbClr val="335299"/>
+              <a:srgbClr val="2655C5"/>
             </a:solidFill>
             <a:prstDash val="dash"/>
           </a:ln>
@@ -5424,7 +5424,7 @@
             <a:r>
               <a:rPr sz="1200" b="0" i="0">
                 <a:solidFill>
-                  <a:srgbClr val="19294D"/>
+                  <a:srgbClr val="11285F"/>
                 </a:solidFill>
               </a:rPr>
               <a:t>사진 6</a:t>
@@ -5504,7 +5504,7 @@
             <a:r>
               <a:rPr sz="3400" b="1" i="0">
                 <a:solidFill>
-                  <a:srgbClr val="19294D"/>
+                  <a:srgbClr val="11285F"/>
                 </a:solidFill>
               </a:rPr>
               <a:t>와 주셔서 고맙습니다</a:t>
@@ -5542,7 +5542,7 @@
             <a:r>
               <a:rPr sz="1700" b="0" i="1">
                 <a:solidFill>
-                  <a:srgbClr val="19294D"/>
+                  <a:srgbClr val="11285F"/>
                 </a:solidFill>
               </a:rPr>
               <a:t>잘 살겠습니다</a:t>
@@ -5607,34 +5607,34 @@
         <a:sysClr val="window" lastClr="FFFFFF"/>
       </a:lt1>
       <a:dk2>
-        <a:srgbClr val="19294D"/>
+        <a:srgbClr val="11285F"/>
       </a:dk2>
       <a:lt2>
-        <a:srgbClr val="F0F3FA"/>
+        <a:srgbClr val="EEF2FC"/>
       </a:lt2>
       <a:accent1>
-        <a:srgbClr val="335299"/>
+        <a:srgbClr val="2655C5"/>
       </a:accent1>
       <a:accent2>
-        <a:srgbClr val="914C3B"/>
+        <a:srgbClr val="209DB6"/>
       </a:accent2>
       <a:accent3>
-        <a:srgbClr val="19294D"/>
+        <a:srgbClr val="11285F"/>
       </a:accent3>
       <a:accent4>
-        <a:srgbClr val="D0DAF1"/>
+        <a:srgbClr val="D1DDFA"/>
       </a:accent4>
       <a:accent5>
-        <a:srgbClr val="624F6A"/>
+        <a:srgbClr val="2379BE"/>
       </a:accent5>
       <a:accent6>
-        <a:srgbClr val="757F94"/>
+        <a:srgbClr val="707E9F"/>
       </a:accent6>
       <a:hlink>
-        <a:srgbClr val="335299"/>
+        <a:srgbClr val="2655C5"/>
       </a:hlink>
       <a:folHlink>
-        <a:srgbClr val="19294D"/>
+        <a:srgbClr val="11285F"/>
       </a:folHlink>
     </a:clrScheme>
     <a:fontScheme name="Office">
